--- a/docs/lectures/01_02_lecture/intor_r_positron_projects.pptx
+++ b/docs/lectures/01_02_lecture/intor_r_positron_projects.pptx
@@ -3368,7 +3368,7 @@
             </a:pPr>
             <a:r>
               <a:rPr/>
-              <a:t>2026-07-02</a:t>
+              <a:t>2026-07-03</a:t>
             </a:r>
           </a:p>
         </p:txBody>

--- a/docs/lectures/01_02_lecture/intor_r_positron_projects.pptx
+++ b/docs/lectures/01_02_lecture/intor_r_positron_projects.pptx
@@ -3368,7 +3368,7 @@
             </a:pPr>
             <a:r>
               <a:rPr/>
-              <a:t>2026-07-03</a:t>
+              <a:t>2026-07-04</a:t>
             </a:r>
           </a:p>
         </p:txBody>
